--- a/PBL.pptx
+++ b/PBL.pptx
@@ -857,7 +857,7 @@
           <a:p>
             <a:fld id="{A7FACB4A-C46D-47C8-95BF-463F9F428625}" type="datetimeFigureOut">
               <a:rPr lang="en-IN" smtClean="0"/>
-              <a:t>13/04/26</a:t>
+              <a:t>14/04/26</a:t>
             </a:fld>
             <a:endParaRPr lang="en-IN"/>
           </a:p>
@@ -1467,7 +1467,7 @@
           <a:p>
             <a:fld id="{A7FACB4A-C46D-47C8-95BF-463F9F428625}" type="datetimeFigureOut">
               <a:rPr lang="en-IN" smtClean="0"/>
-              <a:t>13/04/26</a:t>
+              <a:t>14/04/26</a:t>
             </a:fld>
             <a:endParaRPr lang="en-IN"/>
           </a:p>
@@ -2568,7 +2568,7 @@
           <a:p>
             <a:fld id="{A7FACB4A-C46D-47C8-95BF-463F9F428625}" type="datetimeFigureOut">
               <a:rPr lang="en-IN" smtClean="0"/>
-              <a:t>13/04/26</a:t>
+              <a:t>14/04/26</a:t>
             </a:fld>
             <a:endParaRPr lang="en-IN"/>
           </a:p>
@@ -3526,7 +3526,7 @@
           <a:p>
             <a:fld id="{A7FACB4A-C46D-47C8-95BF-463F9F428625}" type="datetimeFigureOut">
               <a:rPr lang="en-IN" smtClean="0"/>
-              <a:t>13/04/26</a:t>
+              <a:t>14/04/26</a:t>
             </a:fld>
             <a:endParaRPr lang="en-IN"/>
           </a:p>
@@ -5602,7 +5602,7 @@
             <p:ph idx="1"/>
             <p:extLst>
               <p:ext uri="{D42A27DB-BD31-4B8C-83A1-F6EECF244321}">
-                <p14:modId xmlns:p14="http://schemas.microsoft.com/office/powerpoint/2010/main" val="711965488"/>
+                <p14:modId xmlns:p14="http://schemas.microsoft.com/office/powerpoint/2010/main" val="4066041076"/>
               </p:ext>
             </p:extLst>
           </p:nvPr>
@@ -5799,7 +5799,7 @@
                     <a:p>
                       <a:r>
                         <a:rPr lang="en-US" dirty="0"/>
-                        <a:t>Controlled, Verified</a:t>
+                        <a:t>Restricted</a:t>
                       </a:r>
                     </a:p>
                   </a:txBody>
@@ -5950,7 +5950,7 @@
           <a:p>
             <a:r>
               <a:rPr lang="en-US" dirty="0"/>
-              <a:t>Phase 1 demonstrated successful credential compromise and unauthorized access without exploiting software vulnerability.</a:t>
+              <a:t>Phase 1 demonstrated successful credential compromise and unauthorized access without exploiting software vulnerabilities.</a:t>
             </a:r>
           </a:p>
           <a:p>
@@ -6049,12 +6049,6 @@
             <a:r>
               <a:rPr lang="en-US" dirty="0"/>
               <a:t>Comparative evaluation shows identity-based attacks succeed in weak environments but are restricted under Zero Trust controls</a:t>
-            </a:r>
-          </a:p>
-          <a:p>
-            <a:r>
-              <a:rPr lang="en-US" dirty="0"/>
-              <a:t>Identity-based attack behavior evaluated across weak and hardened environments</a:t>
             </a:r>
           </a:p>
           <a:p>
@@ -6903,7 +6897,7 @@
             <p:ph idx="1"/>
             <p:extLst>
               <p:ext uri="{D42A27DB-BD31-4B8C-83A1-F6EECF244321}">
-                <p14:modId xmlns:p14="http://schemas.microsoft.com/office/powerpoint/2010/main" val="3292707871"/>
+                <p14:modId xmlns:p14="http://schemas.microsoft.com/office/powerpoint/2010/main" val="664569124"/>
               </p:ext>
             </p:extLst>
           </p:nvPr>
@@ -7073,16 +7067,12 @@
                     <a:lstStyle/>
                     <a:p>
                       <a:r>
-                        <a:rPr lang="en-US" sz="1000" dirty="0"/>
-                        <a:t>Privacy-</a:t>
-                      </a:r>
-                      <a:r>
-                        <a:rPr lang="en-US" sz="1000" dirty="0" err="1"/>
-                        <a:t>Preserviing</a:t>
+                        <a:rPr lang="en-US" sz="1000"/>
+                        <a:t>Privacy-Preserving </a:t>
                       </a:r>
                       <a:r>
                         <a:rPr lang="en-US" sz="1000" dirty="0"/>
-                        <a:t> authentication and adaptive models</a:t>
+                        <a:t>authentication and adaptive models</a:t>
                       </a:r>
                     </a:p>
                   </a:txBody>
@@ -7200,13 +7190,8 @@
                     <a:p>
                       <a:r>
                         <a:rPr lang="en-US" sz="1000" dirty="0"/>
-                        <a:t>Organizational ZTA </a:t>
+                        <a:t>Organizational ZTA adoption</a:t>
                       </a:r>
-                      <a:r>
-                        <a:rPr lang="en-US" sz="1000" dirty="0" err="1"/>
-                        <a:t>adoptioon</a:t>
-                      </a:r>
-                      <a:endParaRPr lang="en-US" sz="1000" dirty="0"/>
                     </a:p>
                   </a:txBody>
                   <a:tcPr/>
